--- a/2026_Б_ПІ_ПЗПІз-22-1_Тимченко_Є_Г/2026_Б_ПІ_ПЗПІз-22-1_Тимченко_Є_Г.pptx
+++ b/2026_Б_ПІ_ПЗПІз-22-1_Тимченко_Є_Г/2026_Б_ПІ_ПЗПІз-22-1_Тимченко_Є_Г.pptx
@@ -238,7 +238,7 @@
           <a:p>
             <a:fld id="{5603E6C6-9B9F-43BE-AA2C-E07E37876888}" type="datetimeFigureOut">
               <a:rPr lang="en-US" smtClean="0"/>
-              <a:t>01-Jul-26</a:t>
+              <a:t>02-Jul-26</a:t>
             </a:fld>
             <a:endParaRPr lang="en-US"/>
           </a:p>
@@ -416,7 +416,7 @@
           <a:p>
             <a:fld id="{F25790DD-BF1D-43E8-AD9B-BE23FACE3DB0}" type="datetimeFigureOut">
               <a:rPr lang="en-US" smtClean="0"/>
-              <a:t>01-Jul-26</a:t>
+              <a:t>02-Jul-26</a:t>
             </a:fld>
             <a:endParaRPr lang="en-US"/>
           </a:p>
@@ -1990,7 +1990,7 @@
           <a:p>
             <a:fld id="{5BCAD085-E8A6-8845-BD4E-CB4CCA059FC4}" type="datetimeFigureOut">
               <a:rPr lang="en-US" smtClean="0"/>
-              <a:t>01-Jul-26</a:t>
+              <a:t>02-Jul-26</a:t>
             </a:fld>
             <a:endParaRPr lang="en-US"/>
           </a:p>
@@ -2166,7 +2166,7 @@
           <a:p>
             <a:fld id="{5BCAD085-E8A6-8845-BD4E-CB4CCA059FC4}" type="datetimeFigureOut">
               <a:rPr lang="en-US" smtClean="0"/>
-              <a:t>01-Jul-26</a:t>
+              <a:t>02-Jul-26</a:t>
             </a:fld>
             <a:endParaRPr lang="en-US"/>
           </a:p>
@@ -2352,7 +2352,7 @@
           <a:p>
             <a:fld id="{5BCAD085-E8A6-8845-BD4E-CB4CCA059FC4}" type="datetimeFigureOut">
               <a:rPr lang="en-US" smtClean="0"/>
-              <a:t>01-Jul-26</a:t>
+              <a:t>02-Jul-26</a:t>
             </a:fld>
             <a:endParaRPr lang="en-US"/>
           </a:p>
@@ -2528,7 +2528,7 @@
           <a:p>
             <a:fld id="{5BCAD085-E8A6-8845-BD4E-CB4CCA059FC4}" type="datetimeFigureOut">
               <a:rPr lang="en-US" smtClean="0"/>
-              <a:t>01-Jul-26</a:t>
+              <a:t>02-Jul-26</a:t>
             </a:fld>
             <a:endParaRPr lang="en-US"/>
           </a:p>
@@ -2781,7 +2781,7 @@
           <a:p>
             <a:fld id="{5BCAD085-E8A6-8845-BD4E-CB4CCA059FC4}" type="datetimeFigureOut">
               <a:rPr lang="en-US" smtClean="0"/>
-              <a:t>01-Jul-26</a:t>
+              <a:t>02-Jul-26</a:t>
             </a:fld>
             <a:endParaRPr lang="en-US"/>
           </a:p>
@@ -3074,7 +3074,7 @@
           <a:p>
             <a:fld id="{5BCAD085-E8A6-8845-BD4E-CB4CCA059FC4}" type="datetimeFigureOut">
               <a:rPr lang="en-US" smtClean="0"/>
-              <a:t>01-Jul-26</a:t>
+              <a:t>02-Jul-26</a:t>
             </a:fld>
             <a:endParaRPr lang="en-US"/>
           </a:p>
@@ -3501,7 +3501,7 @@
           <a:p>
             <a:fld id="{5BCAD085-E8A6-8845-BD4E-CB4CCA059FC4}" type="datetimeFigureOut">
               <a:rPr lang="en-US" smtClean="0"/>
-              <a:t>01-Jul-26</a:t>
+              <a:t>02-Jul-26</a:t>
             </a:fld>
             <a:endParaRPr lang="en-US"/>
           </a:p>
@@ -3626,7 +3626,7 @@
           <a:p>
             <a:fld id="{5BCAD085-E8A6-8845-BD4E-CB4CCA059FC4}" type="datetimeFigureOut">
               <a:rPr lang="en-US" smtClean="0"/>
-              <a:t>01-Jul-26</a:t>
+              <a:t>02-Jul-26</a:t>
             </a:fld>
             <a:endParaRPr lang="en-US"/>
           </a:p>
@@ -3729,7 +3729,7 @@
           <a:p>
             <a:fld id="{5BCAD085-E8A6-8845-BD4E-CB4CCA059FC4}" type="datetimeFigureOut">
               <a:rPr lang="en-US" smtClean="0"/>
-              <a:t>01-Jul-26</a:t>
+              <a:t>02-Jul-26</a:t>
             </a:fld>
             <a:endParaRPr lang="en-US"/>
           </a:p>
@@ -4021,7 +4021,7 @@
           <a:p>
             <a:fld id="{5BCAD085-E8A6-8845-BD4E-CB4CCA059FC4}" type="datetimeFigureOut">
               <a:rPr lang="en-US" smtClean="0"/>
-              <a:t>01-Jul-26</a:t>
+              <a:t>02-Jul-26</a:t>
             </a:fld>
             <a:endParaRPr lang="en-US"/>
           </a:p>
@@ -4281,7 +4281,7 @@
           <a:p>
             <a:fld id="{5BCAD085-E8A6-8845-BD4E-CB4CCA059FC4}" type="datetimeFigureOut">
               <a:rPr lang="en-US" smtClean="0"/>
-              <a:t>01-Jul-26</a:t>
+              <a:t>02-Jul-26</a:t>
             </a:fld>
             <a:endParaRPr lang="en-US"/>
           </a:p>
@@ -4500,7 +4500,7 @@
           <a:p>
             <a:fld id="{5BCAD085-E8A6-8845-BD4E-CB4CCA059FC4}" type="datetimeFigureOut">
               <a:rPr lang="en-US" smtClean="0"/>
-              <a:t>01-Jul-26</a:t>
+              <a:t>02-Jul-26</a:t>
             </a:fld>
             <a:endParaRPr lang="en-US"/>
           </a:p>
@@ -7210,32 +7210,14 @@
               </a:defRPr>
             </a:pPr>
             <a:r>
-              <a:rPr lang="uk-UA" sz="3600" dirty="0"/>
-              <a:t>В</a:t>
-            </a:r>
-            <a:r>
-              <a:rPr lang="uk-UA" sz="3600" noProof="0" dirty="0" err="1"/>
-              <a:t>еб</a:t>
-            </a:r>
-            <a:r>
-              <a:rPr lang="uk-UA" sz="3600" noProof="0" dirty="0"/>
-              <a:t>-система для побудови та аналізу OLAP-кубів </a:t>
-            </a:r>
-            <a:r>
-              <a:rPr lang="uk-UA" sz="3600" noProof="0" dirty="0" err="1">
+              <a:rPr lang="uk-UA" sz="3600" dirty="0">
                 <a:solidFill>
                   <a:srgbClr val="B2EBF2"/>
                 </a:solidFill>
                 <a:latin typeface="Segoe UI"/>
               </a:rPr>
-              <a:t>CubeApp</a:t>
-            </a:r>
-            <a:endParaRPr lang="uk-UA" sz="3600" noProof="0" dirty="0">
-              <a:solidFill>
-                <a:srgbClr val="B2EBF2"/>
-              </a:solidFill>
-              <a:latin typeface="Segoe UI"/>
-            </a:endParaRPr>
+              <a:t>Веб-система для аналізу та візуалізації користувацьких наборів даних</a:t>
+            </a:r>
           </a:p>
           <a:p>
             <a:pPr>
